--- a/docs/MeAI_CRM대문_고도화_제안_대표이사보고_2026.09.pptx
+++ b/docs/MeAI_CRM대문_고도화_제안_대표이사보고_2026.09.pptx
@@ -2649,7 +2649,7 @@
               <a:buNone/>
             </a:pPr>
             <a:r>
-              <a:rPr lang="en-US" sz="2100" b="1" dirty="0">
+              <a:rPr lang="en-US" sz="1900" b="1" dirty="0">
                 <a:solidFill>
                   <a:srgbClr val="191F28"/>
                 </a:solidFill>
@@ -2659,7 +2659,7 @@
               </a:rPr>
               <a:t>고객 360°와 MeAI 상시 패널로 한 화면에서 완결합니다</a:t>
             </a:r>
-            <a:endParaRPr lang="en-US" sz="2100" dirty="0"/>
+            <a:endParaRPr lang="en-US" sz="1900" dirty="0"/>
           </a:p>
         </p:txBody>
       </p:sp>
@@ -2671,12 +2671,12 @@
         </p:nvSpPr>
         <p:spPr>
           <a:xfrm>
-            <a:off x="502920" y="1033272"/>
-            <a:ext cx="8138160" cy="310896"/>
+            <a:off x="502920" y="1024128"/>
+            <a:ext cx="8138160" cy="384048"/>
           </a:xfrm>
           <a:prstGeom prst="roundRect">
             <a:avLst>
-              <a:gd name="adj" fmla="val 17647"/>
+              <a:gd name="adj" fmla="val 14286"/>
             </a:avLst>
           </a:prstGeom>
           <a:solidFill>
@@ -2698,27 +2698,27 @@
         </p:nvSpPr>
         <p:spPr>
           <a:xfrm>
-            <a:off x="640080" y="1033272"/>
-            <a:ext cx="7863840" cy="310896"/>
-          </a:xfrm>
-          <a:prstGeom prst="rect">
-            <a:avLst/>
-          </a:prstGeom>
-          <a:noFill/>
-          <a:ln/>
-        </p:spPr>
-        <p:txBody>
-          <a:bodyPr wrap="square" lIns="0" tIns="0" rIns="0" bIns="0" rtlCol="0" anchor="ctr"/>
-          <a:lstStyle/>
-          <a:p>
-            <a:pPr algn="l" indent="0" marL="0">
-              <a:lnSpc>
-                <a:spcPct val="115000"/>
-              </a:lnSpc>
-              <a:buNone/>
-            </a:pPr>
-            <a:r>
-              <a:rPr lang="en-US" sz="950" b="1" dirty="0">
+            <a:off x="640080" y="1024128"/>
+            <a:ext cx="7863840" cy="384048"/>
+          </a:xfrm>
+          <a:prstGeom prst="rect">
+            <a:avLst/>
+          </a:prstGeom>
+          <a:noFill/>
+          <a:ln/>
+        </p:spPr>
+        <p:txBody>
+          <a:bodyPr wrap="square" lIns="0" tIns="0" rIns="0" bIns="0" rtlCol="0" anchor="ctr"/>
+          <a:lstStyle/>
+          <a:p>
+            <a:pPr algn="l" indent="0" marL="0">
+              <a:lnSpc>
+                <a:spcPct val="115000"/>
+              </a:lnSpc>
+              <a:buNone/>
+            </a:pPr>
+            <a:r>
+              <a:rPr lang="en-US" sz="900" b="1" dirty="0">
                 <a:solidFill>
                   <a:srgbClr val="3182F6"/>
                 </a:solidFill>
@@ -2735,7 +2735,7 @@
               <a:buNone/>
             </a:pPr>
             <a:r>
-              <a:rPr lang="en-US" sz="950" b="1" dirty="0">
+              <a:rPr lang="en-US" sz="900" b="1" dirty="0">
                 <a:solidFill>
                   <a:srgbClr val="333D4B"/>
                 </a:solidFill>
@@ -2745,7 +2745,7 @@
               </a:rPr>
               <a:t>분석 → 설계 → 제안의 산출물이 고객 단위로 쌓이고, 다음 상담에 자동으로 다시 보입니다</a:t>
             </a:r>
-            <a:endParaRPr lang="en-US" sz="950" dirty="0"/>
+            <a:endParaRPr lang="en-US" sz="900" dirty="0"/>
           </a:p>
         </p:txBody>
       </p:sp>
@@ -3813,7 +3813,7 @@
               <a:buNone/>
             </a:pPr>
             <a:r>
-              <a:rPr lang="en-US" sz="2100" b="1" dirty="0">
+              <a:rPr lang="en-US" sz="1900" b="1" dirty="0">
                 <a:solidFill>
                   <a:srgbClr val="191F28"/>
                 </a:solidFill>
@@ -3821,9 +3821,9 @@
                 <a:ea typeface="맑은 고딕" pitchFamily="34" charset="-122"/>
                 <a:cs typeface="맑은 고딕" pitchFamily="34" charset="-120"/>
               </a:rPr>
-              <a:t>영업 프로세스 다섯 단계가 대문에서 시작해 한 흐름으로 이어집니다</a:t>
-            </a:r>
-            <a:endParaRPr lang="en-US" sz="2100" dirty="0"/>
+              <a:t>영업 5단계가 대문에서 한 흐름으로 이어집니다</a:t>
+            </a:r>
+            <a:endParaRPr lang="en-US" sz="1900" dirty="0"/>
           </a:p>
         </p:txBody>
       </p:sp>
@@ -3835,12 +3835,12 @@
         </p:nvSpPr>
         <p:spPr>
           <a:xfrm>
-            <a:off x="502920" y="1033272"/>
-            <a:ext cx="8138160" cy="310896"/>
+            <a:off x="502920" y="1024128"/>
+            <a:ext cx="8138160" cy="384048"/>
           </a:xfrm>
           <a:prstGeom prst="roundRect">
             <a:avLst>
-              <a:gd name="adj" fmla="val 17647"/>
+              <a:gd name="adj" fmla="val 14286"/>
             </a:avLst>
           </a:prstGeom>
           <a:solidFill>
@@ -3862,27 +3862,27 @@
         </p:nvSpPr>
         <p:spPr>
           <a:xfrm>
-            <a:off x="640080" y="1033272"/>
-            <a:ext cx="7863840" cy="310896"/>
-          </a:xfrm>
-          <a:prstGeom prst="rect">
-            <a:avLst/>
-          </a:prstGeom>
-          <a:noFill/>
-          <a:ln/>
-        </p:spPr>
-        <p:txBody>
-          <a:bodyPr wrap="square" lIns="0" tIns="0" rIns="0" bIns="0" rtlCol="0" anchor="ctr"/>
-          <a:lstStyle/>
-          <a:p>
-            <a:pPr algn="l" indent="0" marL="0">
-              <a:lnSpc>
-                <a:spcPct val="115000"/>
-              </a:lnSpc>
-              <a:buNone/>
-            </a:pPr>
-            <a:r>
-              <a:rPr lang="en-US" sz="950" b="1" dirty="0">
+            <a:off x="640080" y="1024128"/>
+            <a:ext cx="7863840" cy="384048"/>
+          </a:xfrm>
+          <a:prstGeom prst="rect">
+            <a:avLst/>
+          </a:prstGeom>
+          <a:noFill/>
+          <a:ln/>
+        </p:spPr>
+        <p:txBody>
+          <a:bodyPr wrap="square" lIns="0" tIns="0" rIns="0" bIns="0" rtlCol="0" anchor="ctr"/>
+          <a:lstStyle/>
+          <a:p>
+            <a:pPr algn="l" indent="0" marL="0">
+              <a:lnSpc>
+                <a:spcPct val="115000"/>
+              </a:lnSpc>
+              <a:buNone/>
+            </a:pPr>
+            <a:r>
+              <a:rPr lang="en-US" sz="900" b="1" dirty="0">
                 <a:solidFill>
                   <a:srgbClr val="3182F6"/>
                 </a:solidFill>
@@ -3899,7 +3899,7 @@
               <a:buNone/>
             </a:pPr>
             <a:r>
-              <a:rPr lang="en-US" sz="950" b="1" dirty="0">
+              <a:rPr lang="en-US" sz="900" b="1" dirty="0">
                 <a:solidFill>
                   <a:srgbClr val="333D4B"/>
                 </a:solidFill>
@@ -3909,7 +3909,7 @@
               </a:rPr>
               <a:t>같은 화면, 같은 데이터입니다. 바뀌는 것은 "누가 찾아가는가"에서 "무엇이 먼저 오는가"로의 전환입니다</a:t>
             </a:r>
-            <a:endParaRPr lang="en-US" sz="950" dirty="0"/>
+            <a:endParaRPr lang="en-US" sz="900" dirty="0"/>
           </a:p>
         </p:txBody>
       </p:sp>
@@ -5488,7 +5488,7 @@
               <a:buNone/>
             </a:pPr>
             <a:r>
-              <a:rPr lang="en-US" sz="2100" b="1" dirty="0">
+              <a:rPr lang="en-US" sz="1900" b="1" dirty="0">
                 <a:solidFill>
                   <a:srgbClr val="191F28"/>
                 </a:solidFill>
@@ -5498,7 +5498,7 @@
               </a:rPr>
               <a:t>업무는 짧아지고, 컨텐츠는 쓰이고, 영업은 늘어납니다</a:t>
             </a:r>
-            <a:endParaRPr lang="en-US" sz="2100" dirty="0"/>
+            <a:endParaRPr lang="en-US" sz="1900" dirty="0"/>
           </a:p>
         </p:txBody>
       </p:sp>
@@ -5510,12 +5510,12 @@
         </p:nvSpPr>
         <p:spPr>
           <a:xfrm>
-            <a:off x="502920" y="1033272"/>
-            <a:ext cx="8138160" cy="310896"/>
+            <a:off x="502920" y="1024128"/>
+            <a:ext cx="8138160" cy="384048"/>
           </a:xfrm>
           <a:prstGeom prst="roundRect">
             <a:avLst>
-              <a:gd name="adj" fmla="val 17647"/>
+              <a:gd name="adj" fmla="val 14286"/>
             </a:avLst>
           </a:prstGeom>
           <a:solidFill>
@@ -5537,27 +5537,27 @@
         </p:nvSpPr>
         <p:spPr>
           <a:xfrm>
-            <a:off x="640080" y="1033272"/>
-            <a:ext cx="7863840" cy="310896"/>
-          </a:xfrm>
-          <a:prstGeom prst="rect">
-            <a:avLst/>
-          </a:prstGeom>
-          <a:noFill/>
-          <a:ln/>
-        </p:spPr>
-        <p:txBody>
-          <a:bodyPr wrap="square" lIns="0" tIns="0" rIns="0" bIns="0" rtlCol="0" anchor="ctr"/>
-          <a:lstStyle/>
-          <a:p>
-            <a:pPr algn="l" indent="0" marL="0">
-              <a:lnSpc>
-                <a:spcPct val="115000"/>
-              </a:lnSpc>
-              <a:buNone/>
-            </a:pPr>
-            <a:r>
-              <a:rPr lang="en-US" sz="950" b="1" dirty="0">
+            <a:off x="640080" y="1024128"/>
+            <a:ext cx="7863840" cy="384048"/>
+          </a:xfrm>
+          <a:prstGeom prst="rect">
+            <a:avLst/>
+          </a:prstGeom>
+          <a:noFill/>
+          <a:ln/>
+        </p:spPr>
+        <p:txBody>
+          <a:bodyPr wrap="square" lIns="0" tIns="0" rIns="0" bIns="0" rtlCol="0" anchor="ctr"/>
+          <a:lstStyle/>
+          <a:p>
+            <a:pPr algn="l" indent="0" marL="0">
+              <a:lnSpc>
+                <a:spcPct val="115000"/>
+              </a:lnSpc>
+              <a:buNone/>
+            </a:pPr>
+            <a:r>
+              <a:rPr lang="en-US" sz="900" b="1" dirty="0">
                 <a:solidFill>
                   <a:srgbClr val="3182F6"/>
                 </a:solidFill>
@@ -5574,7 +5574,7 @@
               <a:buNone/>
             </a:pPr>
             <a:r>
-              <a:rPr lang="en-US" sz="950" b="1" dirty="0">
+              <a:rPr lang="en-US" sz="900" b="1" dirty="0">
                 <a:solidFill>
                   <a:srgbClr val="333D4B"/>
                 </a:solidFill>
@@ -5584,7 +5584,7 @@
               </a:rPr>
               <a:t>정량 목표는 파일럿 실측으로 검증하고, 영업 성과 근거는 이미 확보된 MeAI 효과 분석(2026.08)을 사용합니다</a:t>
             </a:r>
-            <a:endParaRPr lang="en-US" sz="950" dirty="0"/>
+            <a:endParaRPr lang="en-US" sz="900" dirty="0"/>
           </a:p>
         </p:txBody>
       </p:sp>
@@ -5673,26 +5673,26 @@
         <p:spPr>
           <a:xfrm>
             <a:off x="685800" y="1965960"/>
-            <a:ext cx="1143000" cy="548640"/>
-          </a:xfrm>
-          <a:prstGeom prst="rect">
-            <a:avLst/>
-          </a:prstGeom>
-          <a:noFill/>
-          <a:ln/>
-        </p:spPr>
-        <p:txBody>
-          <a:bodyPr wrap="square" lIns="0" tIns="0" rIns="0" bIns="0" rtlCol="0" anchor="ctr"/>
-          <a:lstStyle/>
-          <a:p>
-            <a:pPr algn="l" indent="0" marL="0">
-              <a:lnSpc>
-                <a:spcPct val="115000"/>
-              </a:lnSpc>
-              <a:buNone/>
-            </a:pPr>
-            <a:r>
-              <a:rPr lang="en-US" sz="1700" b="1" dirty="0">
+            <a:ext cx="1280160" cy="548640"/>
+          </a:xfrm>
+          <a:prstGeom prst="rect">
+            <a:avLst/>
+          </a:prstGeom>
+          <a:noFill/>
+          <a:ln/>
+        </p:spPr>
+        <p:txBody>
+          <a:bodyPr wrap="square" lIns="0" tIns="0" rIns="0" bIns="0" rtlCol="0" anchor="ctr"/>
+          <a:lstStyle/>
+          <a:p>
+            <a:pPr algn="l" indent="0" marL="0">
+              <a:lnSpc>
+                <a:spcPct val="115000"/>
+              </a:lnSpc>
+              <a:buNone/>
+            </a:pPr>
+            <a:r>
+              <a:rPr lang="en-US" sz="1500" b="1" dirty="0">
                 <a:solidFill>
                   <a:srgbClr val="191F28"/>
                 </a:solidFill>
@@ -5702,7 +5702,7 @@
               </a:rPr>
               <a:t>6회 → 1회</a:t>
             </a:r>
-            <a:endParaRPr lang="en-US" sz="1700" dirty="0"/>
+            <a:endParaRPr lang="en-US" sz="1500" dirty="0"/>
           </a:p>
         </p:txBody>
       </p:sp>
@@ -5714,8 +5714,8 @@
         </p:nvSpPr>
         <p:spPr>
           <a:xfrm>
-            <a:off x="1783080" y="1965960"/>
-            <a:ext cx="1188720" cy="548640"/>
+            <a:off x="1965960" y="1965960"/>
+            <a:ext cx="1005840" cy="548640"/>
           </a:xfrm>
           <a:prstGeom prst="rect">
             <a:avLst/>
@@ -5734,7 +5734,7 @@
               <a:buNone/>
             </a:pPr>
             <a:r>
-              <a:rPr lang="en-US" sz="830" dirty="0">
+              <a:rPr lang="en-US" sz="800" dirty="0">
                 <a:solidFill>
                   <a:srgbClr val="4E5968"/>
                 </a:solidFill>
@@ -5744,7 +5744,7 @@
               </a:rPr>
               <a:t>제안 업무 화면 이동</a:t>
             </a:r>
-            <a:endParaRPr lang="en-US" sz="830" dirty="0"/>
+            <a:endParaRPr lang="en-US" sz="800" dirty="0"/>
           </a:p>
         </p:txBody>
       </p:sp>
@@ -5757,26 +5757,26 @@
         <p:spPr>
           <a:xfrm>
             <a:off x="685800" y="2624328"/>
-            <a:ext cx="1143000" cy="548640"/>
-          </a:xfrm>
-          <a:prstGeom prst="rect">
-            <a:avLst/>
-          </a:prstGeom>
-          <a:noFill/>
-          <a:ln/>
-        </p:spPr>
-        <p:txBody>
-          <a:bodyPr wrap="square" lIns="0" tIns="0" rIns="0" bIns="0" rtlCol="0" anchor="ctr"/>
-          <a:lstStyle/>
-          <a:p>
-            <a:pPr algn="l" indent="0" marL="0">
-              <a:lnSpc>
-                <a:spcPct val="115000"/>
-              </a:lnSpc>
-              <a:buNone/>
-            </a:pPr>
-            <a:r>
-              <a:rPr lang="en-US" sz="1700" b="1" dirty="0">
+            <a:ext cx="1280160" cy="548640"/>
+          </a:xfrm>
+          <a:prstGeom prst="rect">
+            <a:avLst/>
+          </a:prstGeom>
+          <a:noFill/>
+          <a:ln/>
+        </p:spPr>
+        <p:txBody>
+          <a:bodyPr wrap="square" lIns="0" tIns="0" rIns="0" bIns="0" rtlCol="0" anchor="ctr"/>
+          <a:lstStyle/>
+          <a:p>
+            <a:pPr algn="l" indent="0" marL="0">
+              <a:lnSpc>
+                <a:spcPct val="115000"/>
+              </a:lnSpc>
+              <a:buNone/>
+            </a:pPr>
+            <a:r>
+              <a:rPr lang="en-US" sz="1500" b="1" dirty="0">
                 <a:solidFill>
                   <a:srgbClr val="191F28"/>
                 </a:solidFill>
@@ -5786,7 +5786,7 @@
               </a:rPr>
               <a:t>3회 → 0회</a:t>
             </a:r>
-            <a:endParaRPr lang="en-US" sz="1700" dirty="0"/>
+            <a:endParaRPr lang="en-US" sz="1500" dirty="0"/>
           </a:p>
         </p:txBody>
       </p:sp>
@@ -5798,8 +5798,8 @@
         </p:nvSpPr>
         <p:spPr>
           <a:xfrm>
-            <a:off x="1783080" y="2624328"/>
-            <a:ext cx="1188720" cy="548640"/>
+            <a:off x="1965960" y="2624328"/>
+            <a:ext cx="1005840" cy="548640"/>
           </a:xfrm>
           <a:prstGeom prst="rect">
             <a:avLst/>
@@ -5818,7 +5818,7 @@
               <a:buNone/>
             </a:pPr>
             <a:r>
-              <a:rPr lang="en-US" sz="830" dirty="0">
+              <a:rPr lang="en-US" sz="800" dirty="0">
                 <a:solidFill>
                   <a:srgbClr val="4E5968"/>
                 </a:solidFill>
@@ -5828,7 +5828,7 @@
               </a:rPr>
               <a:t>고객정보 재입력</a:t>
             </a:r>
-            <a:endParaRPr lang="en-US" sz="830" dirty="0"/>
+            <a:endParaRPr lang="en-US" sz="800" dirty="0"/>
           </a:p>
         </p:txBody>
       </p:sp>
@@ -5841,26 +5841,26 @@
         <p:spPr>
           <a:xfrm>
             <a:off x="685800" y="3282696"/>
-            <a:ext cx="1143000" cy="548640"/>
-          </a:xfrm>
-          <a:prstGeom prst="rect">
-            <a:avLst/>
-          </a:prstGeom>
-          <a:noFill/>
-          <a:ln/>
-        </p:spPr>
-        <p:txBody>
-          <a:bodyPr wrap="square" lIns="0" tIns="0" rIns="0" bIns="0" rtlCol="0" anchor="ctr"/>
-          <a:lstStyle/>
-          <a:p>
-            <a:pPr algn="l" indent="0" marL="0">
-              <a:lnSpc>
-                <a:spcPct val="115000"/>
-              </a:lnSpc>
-              <a:buNone/>
-            </a:pPr>
-            <a:r>
-              <a:rPr lang="en-US" sz="1700" b="1" dirty="0">
+            <a:ext cx="1280160" cy="548640"/>
+          </a:xfrm>
+          <a:prstGeom prst="rect">
+            <a:avLst/>
+          </a:prstGeom>
+          <a:noFill/>
+          <a:ln/>
+        </p:spPr>
+        <p:txBody>
+          <a:bodyPr wrap="square" lIns="0" tIns="0" rIns="0" bIns="0" rtlCol="0" anchor="ctr"/>
+          <a:lstStyle/>
+          <a:p>
+            <a:pPr algn="l" indent="0" marL="0">
+              <a:lnSpc>
+                <a:spcPct val="115000"/>
+              </a:lnSpc>
+              <a:buNone/>
+            </a:pPr>
+            <a:r>
+              <a:rPr lang="en-US" sz="1500" b="1" dirty="0">
                 <a:solidFill>
                   <a:srgbClr val="191F28"/>
                 </a:solidFill>
@@ -5870,7 +5870,7 @@
               </a:rPr>
               <a:t>4개 → 1개</a:t>
             </a:r>
-            <a:endParaRPr lang="en-US" sz="1700" dirty="0"/>
+            <a:endParaRPr lang="en-US" sz="1500" dirty="0"/>
           </a:p>
         </p:txBody>
       </p:sp>
@@ -5882,8 +5882,8 @@
         </p:nvSpPr>
         <p:spPr>
           <a:xfrm>
-            <a:off x="1783080" y="3282696"/>
-            <a:ext cx="1188720" cy="548640"/>
+            <a:off x="1965960" y="3282696"/>
+            <a:ext cx="1005840" cy="548640"/>
           </a:xfrm>
           <a:prstGeom prst="rect">
             <a:avLst/>
@@ -5902,7 +5902,7 @@
               <a:buNone/>
             </a:pPr>
             <a:r>
-              <a:rPr lang="en-US" sz="830" dirty="0">
+              <a:rPr lang="en-US" sz="800" dirty="0">
                 <a:solidFill>
                   <a:srgbClr val="4E5968"/>
                 </a:solidFill>
@@ -5912,7 +5912,7 @@
               </a:rPr>
               <a:t>고객 1명 파악 화면</a:t>
             </a:r>
-            <a:endParaRPr lang="en-US" sz="830" dirty="0"/>
+            <a:endParaRPr lang="en-US" sz="800" dirty="0"/>
           </a:p>
         </p:txBody>
       </p:sp>
@@ -6001,26 +6001,26 @@
         <p:spPr>
           <a:xfrm>
             <a:off x="3429000" y="1965960"/>
-            <a:ext cx="1143000" cy="548640"/>
-          </a:xfrm>
-          <a:prstGeom prst="rect">
-            <a:avLst/>
-          </a:prstGeom>
-          <a:noFill/>
-          <a:ln/>
-        </p:spPr>
-        <p:txBody>
-          <a:bodyPr wrap="square" lIns="0" tIns="0" rIns="0" bIns="0" rtlCol="0" anchor="ctr"/>
-          <a:lstStyle/>
-          <a:p>
-            <a:pPr algn="l" indent="0" marL="0">
-              <a:lnSpc>
-                <a:spcPct val="115000"/>
-              </a:lnSpc>
-              <a:buNone/>
-            </a:pPr>
-            <a:r>
-              <a:rPr lang="en-US" sz="1700" b="1" dirty="0">
+            <a:ext cx="1280160" cy="548640"/>
+          </a:xfrm>
+          <a:prstGeom prst="rect">
+            <a:avLst/>
+          </a:prstGeom>
+          <a:noFill/>
+          <a:ln/>
+        </p:spPr>
+        <p:txBody>
+          <a:bodyPr wrap="square" lIns="0" tIns="0" rIns="0" bIns="0" rtlCol="0" anchor="ctr"/>
+          <a:lstStyle/>
+          <a:p>
+            <a:pPr algn="l" indent="0" marL="0">
+              <a:lnSpc>
+                <a:spcPct val="115000"/>
+              </a:lnSpc>
+              <a:buNone/>
+            </a:pPr>
+            <a:r>
+              <a:rPr lang="en-US" sz="1500" b="1" dirty="0">
                 <a:solidFill>
                   <a:srgbClr val="191F28"/>
                 </a:solidFill>
@@ -6030,7 +6030,7 @@
               </a:rPr>
               <a:t>2.8배</a:t>
             </a:r>
-            <a:endParaRPr lang="en-US" sz="1700" dirty="0"/>
+            <a:endParaRPr lang="en-US" sz="1500" dirty="0"/>
           </a:p>
         </p:txBody>
       </p:sp>
@@ -6042,8 +6042,8 @@
         </p:nvSpPr>
         <p:spPr>
           <a:xfrm>
-            <a:off x="4526280" y="1965960"/>
-            <a:ext cx="1188720" cy="548640"/>
+            <a:off x="4709160" y="1965960"/>
+            <a:ext cx="1005840" cy="548640"/>
           </a:xfrm>
           <a:prstGeom prst="rect">
             <a:avLst/>
@@ -6062,7 +6062,7 @@
               <a:buNone/>
             </a:pPr>
             <a:r>
-              <a:rPr lang="en-US" sz="830" dirty="0">
+              <a:rPr lang="en-US" sz="800" dirty="0">
                 <a:solidFill>
                   <a:srgbClr val="4E5968"/>
                 </a:solidFill>
@@ -6072,7 +6072,7 @@
               </a:rPr>
               <a:t>체결전환율 12.7% → 35.4%</a:t>
             </a:r>
-            <a:endParaRPr lang="en-US" sz="830" dirty="0"/>
+            <a:endParaRPr lang="en-US" sz="800" dirty="0"/>
           </a:p>
         </p:txBody>
       </p:sp>
@@ -6085,26 +6085,26 @@
         <p:spPr>
           <a:xfrm>
             <a:off x="3429000" y="2624328"/>
-            <a:ext cx="1143000" cy="548640"/>
-          </a:xfrm>
-          <a:prstGeom prst="rect">
-            <a:avLst/>
-          </a:prstGeom>
-          <a:noFill/>
-          <a:ln/>
-        </p:spPr>
-        <p:txBody>
-          <a:bodyPr wrap="square" lIns="0" tIns="0" rIns="0" bIns="0" rtlCol="0" anchor="ctr"/>
-          <a:lstStyle/>
-          <a:p>
-            <a:pPr algn="l" indent="0" marL="0">
-              <a:lnSpc>
-                <a:spcPct val="115000"/>
-              </a:lnSpc>
-              <a:buNone/>
-            </a:pPr>
-            <a:r>
-              <a:rPr lang="en-US" sz="1700" b="1" dirty="0">
+            <a:ext cx="1280160" cy="548640"/>
+          </a:xfrm>
+          <a:prstGeom prst="rect">
+            <a:avLst/>
+          </a:prstGeom>
+          <a:noFill/>
+          <a:ln/>
+        </p:spPr>
+        <p:txBody>
+          <a:bodyPr wrap="square" lIns="0" tIns="0" rIns="0" bIns="0" rtlCol="0" anchor="ctr"/>
+          <a:lstStyle/>
+          <a:p>
+            <a:pPr algn="l" indent="0" marL="0">
+              <a:lnSpc>
+                <a:spcPct val="115000"/>
+              </a:lnSpc>
+              <a:buNone/>
+            </a:pPr>
+            <a:r>
+              <a:rPr lang="en-US" sz="1500" b="1" dirty="0">
                 <a:solidFill>
                   <a:srgbClr val="191F28"/>
                 </a:solidFill>
@@ -6114,7 +6114,7 @@
               </a:rPr>
               <a:t>4배</a:t>
             </a:r>
-            <a:endParaRPr lang="en-US" sz="1700" dirty="0"/>
+            <a:endParaRPr lang="en-US" sz="1500" dirty="0"/>
           </a:p>
         </p:txBody>
       </p:sp>
@@ -6126,8 +6126,8 @@
         </p:nvSpPr>
         <p:spPr>
           <a:xfrm>
-            <a:off x="4526280" y="2624328"/>
-            <a:ext cx="1188720" cy="548640"/>
+            <a:off x="4709160" y="2624328"/>
+            <a:ext cx="1005840" cy="548640"/>
           </a:xfrm>
           <a:prstGeom prst="rect">
             <a:avLst/>
@@ -6146,7 +6146,7 @@
               <a:buNone/>
             </a:pPr>
             <a:r>
-              <a:rPr lang="en-US" sz="830" dirty="0">
+              <a:rPr lang="en-US" sz="800" dirty="0">
                 <a:solidFill>
                   <a:srgbClr val="4E5968"/>
                 </a:solidFill>
@@ -6156,7 +6156,7 @@
               </a:rPr>
               <a:t>같은 FP 고객 비교 9.0% → 36.0%</a:t>
             </a:r>
-            <a:endParaRPr lang="en-US" sz="830" dirty="0"/>
+            <a:endParaRPr lang="en-US" sz="800" dirty="0"/>
           </a:p>
         </p:txBody>
       </p:sp>
@@ -6169,26 +6169,26 @@
         <p:spPr>
           <a:xfrm>
             <a:off x="3429000" y="3282696"/>
-            <a:ext cx="1143000" cy="548640"/>
-          </a:xfrm>
-          <a:prstGeom prst="rect">
-            <a:avLst/>
-          </a:prstGeom>
-          <a:noFill/>
-          <a:ln/>
-        </p:spPr>
-        <p:txBody>
-          <a:bodyPr wrap="square" lIns="0" tIns="0" rIns="0" bIns="0" rtlCol="0" anchor="ctr"/>
-          <a:lstStyle/>
-          <a:p>
-            <a:pPr algn="l" indent="0" marL="0">
-              <a:lnSpc>
-                <a:spcPct val="115000"/>
-              </a:lnSpc>
-              <a:buNone/>
-            </a:pPr>
-            <a:r>
-              <a:rPr lang="en-US" sz="1700" b="1" dirty="0">
+            <a:ext cx="1280160" cy="548640"/>
+          </a:xfrm>
+          <a:prstGeom prst="rect">
+            <a:avLst/>
+          </a:prstGeom>
+          <a:noFill/>
+          <a:ln/>
+        </p:spPr>
+        <p:txBody>
+          <a:bodyPr wrap="square" lIns="0" tIns="0" rIns="0" bIns="0" rtlCol="0" anchor="ctr"/>
+          <a:lstStyle/>
+          <a:p>
+            <a:pPr algn="l" indent="0" marL="0">
+              <a:lnSpc>
+                <a:spcPct val="115000"/>
+              </a:lnSpc>
+              <a:buNone/>
+            </a:pPr>
+            <a:r>
+              <a:rPr lang="en-US" sz="1500" b="1" dirty="0">
                 <a:solidFill>
                   <a:srgbClr val="191F28"/>
                 </a:solidFill>
@@ -6198,7 +6198,7 @@
               </a:rPr>
               <a:t>7% 미만</a:t>
             </a:r>
-            <a:endParaRPr lang="en-US" sz="1700" dirty="0"/>
+            <a:endParaRPr lang="en-US" sz="1500" dirty="0"/>
           </a:p>
         </p:txBody>
       </p:sp>
@@ -6210,8 +6210,8 @@
         </p:nvSpPr>
         <p:spPr>
           <a:xfrm>
-            <a:off x="4526280" y="3282696"/>
-            <a:ext cx="1188720" cy="548640"/>
+            <a:off x="4709160" y="3282696"/>
+            <a:ext cx="1005840" cy="548640"/>
           </a:xfrm>
           <a:prstGeom prst="rect">
             <a:avLst/>
@@ -6230,7 +6230,7 @@
               <a:buNone/>
             </a:pPr>
             <a:r>
-              <a:rPr lang="en-US" sz="830" dirty="0">
+              <a:rPr lang="en-US" sz="800" dirty="0">
                 <a:solidFill>
                   <a:srgbClr val="4E5968"/>
                 </a:solidFill>
@@ -6240,7 +6240,7 @@
               </a:rPr>
               <a:t>보유고객 영업 시도율(현행) → 대문 추천으로 확대</a:t>
             </a:r>
-            <a:endParaRPr lang="en-US" sz="830" dirty="0"/>
+            <a:endParaRPr lang="en-US" sz="800" dirty="0"/>
           </a:p>
         </p:txBody>
       </p:sp>
@@ -6329,26 +6329,26 @@
         <p:spPr>
           <a:xfrm>
             <a:off x="6172200" y="1965960"/>
-            <a:ext cx="1143000" cy="548640"/>
-          </a:xfrm>
-          <a:prstGeom prst="rect">
-            <a:avLst/>
-          </a:prstGeom>
-          <a:noFill/>
-          <a:ln/>
-        </p:spPr>
-        <p:txBody>
-          <a:bodyPr wrap="square" lIns="0" tIns="0" rIns="0" bIns="0" rtlCol="0" anchor="ctr"/>
-          <a:lstStyle/>
-          <a:p>
-            <a:pPr algn="l" indent="0" marL="0">
-              <a:lnSpc>
-                <a:spcPct val="115000"/>
-              </a:lnSpc>
-              <a:buNone/>
-            </a:pPr>
-            <a:r>
-              <a:rPr lang="en-US" sz="1700" b="1" dirty="0">
+            <a:ext cx="1280160" cy="548640"/>
+          </a:xfrm>
+          <a:prstGeom prst="rect">
+            <a:avLst/>
+          </a:prstGeom>
+          <a:noFill/>
+          <a:ln/>
+        </p:spPr>
+        <p:txBody>
+          <a:bodyPr wrap="square" lIns="0" tIns="0" rIns="0" bIns="0" rtlCol="0" anchor="ctr"/>
+          <a:lstStyle/>
+          <a:p>
+            <a:pPr algn="l" indent="0" marL="0">
+              <a:lnSpc>
+                <a:spcPct val="115000"/>
+              </a:lnSpc>
+              <a:buNone/>
+            </a:pPr>
+            <a:r>
+              <a:rPr lang="en-US" sz="1500" b="1" dirty="0">
                 <a:solidFill>
                   <a:srgbClr val="191F28"/>
                 </a:solidFill>
@@ -6358,7 +6358,7 @@
               </a:rPr>
               <a:t>0원</a:t>
             </a:r>
-            <a:endParaRPr lang="en-US" sz="1700" dirty="0"/>
+            <a:endParaRPr lang="en-US" sz="1500" dirty="0"/>
           </a:p>
         </p:txBody>
       </p:sp>
@@ -6370,8 +6370,8 @@
         </p:nvSpPr>
         <p:spPr>
           <a:xfrm>
-            <a:off x="7269480" y="1965960"/>
-            <a:ext cx="1188720" cy="548640"/>
+            <a:off x="7452360" y="1965960"/>
+            <a:ext cx="1005840" cy="548640"/>
           </a:xfrm>
           <a:prstGeom prst="rect">
             <a:avLst/>
@@ -6390,7 +6390,7 @@
               <a:buNone/>
             </a:pPr>
             <a:r>
-              <a:rPr lang="en-US" sz="830" dirty="0">
+              <a:rPr lang="en-US" sz="800" dirty="0">
                 <a:solidFill>
                   <a:srgbClr val="4E5968"/>
                 </a:solidFill>
@@ -6400,7 +6400,7 @@
               </a:rPr>
               <a:t>추가 구매 없이 활용률 제고</a:t>
             </a:r>
-            <a:endParaRPr lang="en-US" sz="830" dirty="0"/>
+            <a:endParaRPr lang="en-US" sz="800" dirty="0"/>
           </a:p>
         </p:txBody>
       </p:sp>
@@ -6413,26 +6413,26 @@
         <p:spPr>
           <a:xfrm>
             <a:off x="6172200" y="2624328"/>
-            <a:ext cx="1143000" cy="548640"/>
-          </a:xfrm>
-          <a:prstGeom prst="rect">
-            <a:avLst/>
-          </a:prstGeom>
-          <a:noFill/>
-          <a:ln/>
-        </p:spPr>
-        <p:txBody>
-          <a:bodyPr wrap="square" lIns="0" tIns="0" rIns="0" bIns="0" rtlCol="0" anchor="ctr"/>
-          <a:lstStyle/>
-          <a:p>
-            <a:pPr algn="l" indent="0" marL="0">
-              <a:lnSpc>
-                <a:spcPct val="115000"/>
-              </a:lnSpc>
-              <a:buNone/>
-            </a:pPr>
-            <a:r>
-              <a:rPr lang="en-US" sz="1700" b="1" dirty="0">
+            <a:ext cx="1280160" cy="548640"/>
+          </a:xfrm>
+          <a:prstGeom prst="rect">
+            <a:avLst/>
+          </a:prstGeom>
+          <a:noFill/>
+          <a:ln/>
+        </p:spPr>
+        <p:txBody>
+          <a:bodyPr wrap="square" lIns="0" tIns="0" rIns="0" bIns="0" rtlCol="0" anchor="ctr"/>
+          <a:lstStyle/>
+          <a:p>
+            <a:pPr algn="l" indent="0" marL="0">
+              <a:lnSpc>
+                <a:spcPct val="115000"/>
+              </a:lnSpc>
+              <a:buNone/>
+            </a:pPr>
+            <a:r>
+              <a:rPr lang="en-US" sz="1500" b="1" dirty="0">
                 <a:solidFill>
                   <a:srgbClr val="191F28"/>
                 </a:solidFill>
@@ -6442,7 +6442,7 @@
               </a:rPr>
               <a:t>신설</a:t>
             </a:r>
-            <a:endParaRPr lang="en-US" sz="1700" dirty="0"/>
+            <a:endParaRPr lang="en-US" sz="1500" dirty="0"/>
           </a:p>
         </p:txBody>
       </p:sp>
@@ -6454,8 +6454,8 @@
         </p:nvSpPr>
         <p:spPr>
           <a:xfrm>
-            <a:off x="7269480" y="2624328"/>
-            <a:ext cx="1188720" cy="548640"/>
+            <a:off x="7452360" y="2624328"/>
+            <a:ext cx="1005840" cy="548640"/>
           </a:xfrm>
           <a:prstGeom prst="rect">
             <a:avLst/>
@@ -6474,7 +6474,7 @@
               <a:buNone/>
             </a:pPr>
             <a:r>
-              <a:rPr lang="en-US" sz="830" dirty="0">
+              <a:rPr lang="en-US" sz="800" dirty="0">
                 <a:solidFill>
                   <a:srgbClr val="4E5968"/>
                 </a:solidFill>
@@ -6484,7 +6484,7 @@
               </a:rPr>
               <a:t>컨텐츠별 발송 · 전환 측정 지표</a:t>
             </a:r>
-            <a:endParaRPr lang="en-US" sz="830" dirty="0"/>
+            <a:endParaRPr lang="en-US" sz="800" dirty="0"/>
           </a:p>
         </p:txBody>
       </p:sp>
@@ -6497,26 +6497,26 @@
         <p:spPr>
           <a:xfrm>
             <a:off x="6172200" y="3282696"/>
-            <a:ext cx="1143000" cy="548640"/>
-          </a:xfrm>
-          <a:prstGeom prst="rect">
-            <a:avLst/>
-          </a:prstGeom>
-          <a:noFill/>
-          <a:ln/>
-        </p:spPr>
-        <p:txBody>
-          <a:bodyPr wrap="square" lIns="0" tIns="0" rIns="0" bIns="0" rtlCol="0" anchor="ctr"/>
-          <a:lstStyle/>
-          <a:p>
-            <a:pPr algn="l" indent="0" marL="0">
-              <a:lnSpc>
-                <a:spcPct val="115000"/>
-              </a:lnSpc>
-              <a:buNone/>
-            </a:pPr>
-            <a:r>
-              <a:rPr lang="en-US" sz="1700" b="1" dirty="0">
+            <a:ext cx="1280160" cy="548640"/>
+          </a:xfrm>
+          <a:prstGeom prst="rect">
+            <a:avLst/>
+          </a:prstGeom>
+          <a:noFill/>
+          <a:ln/>
+        </p:spPr>
+        <p:txBody>
+          <a:bodyPr wrap="square" lIns="0" tIns="0" rIns="0" bIns="0" rtlCol="0" anchor="ctr"/>
+          <a:lstStyle/>
+          <a:p>
+            <a:pPr algn="l" indent="0" marL="0">
+              <a:lnSpc>
+                <a:spcPct val="115000"/>
+              </a:lnSpc>
+              <a:buNone/>
+            </a:pPr>
+            <a:r>
+              <a:rPr lang="en-US" sz="1500" b="1" dirty="0">
                 <a:solidFill>
                   <a:srgbClr val="191F28"/>
                 </a:solidFill>
@@ -6526,7 +6526,7 @@
               </a:rPr>
               <a:t>근거</a:t>
             </a:r>
-            <a:endParaRPr lang="en-US" sz="1700" dirty="0"/>
+            <a:endParaRPr lang="en-US" sz="1500" dirty="0"/>
           </a:p>
         </p:txBody>
       </p:sp>
@@ -6538,8 +6538,8 @@
         </p:nvSpPr>
         <p:spPr>
           <a:xfrm>
-            <a:off x="7269480" y="3282696"/>
-            <a:ext cx="1188720" cy="548640"/>
+            <a:off x="7452360" y="3282696"/>
+            <a:ext cx="1005840" cy="548640"/>
           </a:xfrm>
           <a:prstGeom prst="rect">
             <a:avLst/>
@@ -6558,7 +6558,7 @@
               <a:buNone/>
             </a:pPr>
             <a:r>
-              <a:rPr lang="en-US" sz="830" dirty="0">
+              <a:rPr lang="en-US" sz="800" dirty="0">
                 <a:solidFill>
                   <a:srgbClr val="4E5968"/>
                 </a:solidFill>
@@ -6568,7 +6568,7 @@
               </a:rPr>
               <a:t>차년도 컨텐츠 예산 편성 자료</a:t>
             </a:r>
-            <a:endParaRPr lang="en-US" sz="830" dirty="0"/>
+            <a:endParaRPr lang="en-US" sz="800" dirty="0"/>
           </a:p>
         </p:txBody>
       </p:sp>
@@ -6873,7 +6873,7 @@
               <a:buNone/>
             </a:pPr>
             <a:r>
-              <a:rPr lang="en-US" sz="2100" b="1" dirty="0">
+              <a:rPr lang="en-US" sz="1900" b="1" dirty="0">
                 <a:solidFill>
                   <a:srgbClr val="191F28"/>
                 </a:solidFill>
@@ -6883,7 +6883,7 @@
               </a:rPr>
               <a:t>10월 대문 오픈을 1단계로, 세 단계 점진 추진</a:t>
             </a:r>
-            <a:endParaRPr lang="en-US" sz="2100" dirty="0"/>
+            <a:endParaRPr lang="en-US" sz="1900" dirty="0"/>
           </a:p>
         </p:txBody>
       </p:sp>
@@ -6895,12 +6895,12 @@
         </p:nvSpPr>
         <p:spPr>
           <a:xfrm>
-            <a:off x="502920" y="1033272"/>
-            <a:ext cx="8138160" cy="310896"/>
+            <a:off x="502920" y="1024128"/>
+            <a:ext cx="8138160" cy="384048"/>
           </a:xfrm>
           <a:prstGeom prst="roundRect">
             <a:avLst>
-              <a:gd name="adj" fmla="val 17647"/>
+              <a:gd name="adj" fmla="val 14286"/>
             </a:avLst>
           </a:prstGeom>
           <a:solidFill>
@@ -6922,27 +6922,27 @@
         </p:nvSpPr>
         <p:spPr>
           <a:xfrm>
-            <a:off x="640080" y="1033272"/>
-            <a:ext cx="7863840" cy="310896"/>
-          </a:xfrm>
-          <a:prstGeom prst="rect">
-            <a:avLst/>
-          </a:prstGeom>
-          <a:noFill/>
-          <a:ln/>
-        </p:spPr>
-        <p:txBody>
-          <a:bodyPr wrap="square" lIns="0" tIns="0" rIns="0" bIns="0" rtlCol="0" anchor="ctr"/>
-          <a:lstStyle/>
-          <a:p>
-            <a:pPr algn="l" indent="0" marL="0">
-              <a:lnSpc>
-                <a:spcPct val="115000"/>
-              </a:lnSpc>
-              <a:buNone/>
-            </a:pPr>
-            <a:r>
-              <a:rPr lang="en-US" sz="950" b="1" dirty="0">
+            <a:off x="640080" y="1024128"/>
+            <a:ext cx="7863840" cy="384048"/>
+          </a:xfrm>
+          <a:prstGeom prst="rect">
+            <a:avLst/>
+          </a:prstGeom>
+          <a:noFill/>
+          <a:ln/>
+        </p:spPr>
+        <p:txBody>
+          <a:bodyPr wrap="square" lIns="0" tIns="0" rIns="0" bIns="0" rtlCol="0" anchor="ctr"/>
+          <a:lstStyle/>
+          <a:p>
+            <a:pPr algn="l" indent="0" marL="0">
+              <a:lnSpc>
+                <a:spcPct val="115000"/>
+              </a:lnSpc>
+              <a:buNone/>
+            </a:pPr>
+            <a:r>
+              <a:rPr lang="en-US" sz="900" b="1" dirty="0">
                 <a:solidFill>
                   <a:srgbClr val="3182F6"/>
                 </a:solidFill>
@@ -6959,7 +6959,7 @@
               <a:buNone/>
             </a:pPr>
             <a:r>
-              <a:rPr lang="en-US" sz="950" b="1" dirty="0">
+              <a:rPr lang="en-US" sz="900" b="1" dirty="0">
                 <a:solidFill>
                   <a:srgbClr val="333D4B"/>
                 </a:solidFill>
@@ -6969,7 +6969,7 @@
               </a:rPr>
               <a:t>빅뱅 전환이 아닙니다. 각 단계는 현장 파일럿으로 검증한 뒤 확산하고, 전환 기간 중 신 · 구 경로를 병행합니다</a:t>
             </a:r>
-            <a:endParaRPr lang="en-US" sz="950" dirty="0"/>
+            <a:endParaRPr lang="en-US" sz="900" dirty="0"/>
           </a:p>
         </p:txBody>
       </p:sp>
@@ -8655,7 +8655,7 @@
               <a:buNone/>
             </a:pPr>
             <a:r>
-              <a:rPr lang="en-US" sz="2100" b="1" dirty="0">
+              <a:rPr lang="en-US" sz="1900" b="1" dirty="0">
                 <a:solidFill>
                   <a:srgbClr val="191F28"/>
                 </a:solidFill>
@@ -8663,9 +8663,9 @@
                 <a:ea typeface="맑은 고딕" pitchFamily="34" charset="-122"/>
                 <a:cs typeface="맑은 고딕" pitchFamily="34" charset="-120"/>
               </a:rPr>
-              <a:t>승인해 주시면, 컨텐츠 인벤토리부터 즉시 착수하겠습니다</a:t>
-            </a:r>
-            <a:endParaRPr lang="en-US" sz="2100" dirty="0"/>
+              <a:t>승인 시 컨텐츠 인벤토리부터 즉시 착수합니다</a:t>
+            </a:r>
+            <a:endParaRPr lang="en-US" sz="1900" dirty="0"/>
           </a:p>
         </p:txBody>
       </p:sp>
@@ -9349,7 +9349,7 @@
                 <a:ea typeface="맑은 고딕" pitchFamily="34" charset="-122"/>
                 <a:cs typeface="맑은 고딕" pitchFamily="34" charset="-120"/>
               </a:rPr>
-              <a:t>2026.10 ~ 11</a:t>
+              <a:t>2026.10~11</a:t>
             </a:r>
             <a:endParaRPr lang="en-US" sz="850" dirty="0"/>
           </a:p>
@@ -10115,7 +10115,7 @@
               <a:buNone/>
             </a:pPr>
             <a:r>
-              <a:rPr lang="en-US" sz="2100" b="1" dirty="0">
+              <a:rPr lang="en-US" sz="1900" b="1" dirty="0">
                 <a:solidFill>
                   <a:srgbClr val="191F28"/>
                 </a:solidFill>
@@ -10123,9 +10123,9 @@
                 <a:ea typeface="맑은 고딕" pitchFamily="34" charset="-122"/>
                 <a:cs typeface="맑은 고딕" pitchFamily="34" charset="-120"/>
               </a:rPr>
-              <a:t>기능이 부족한 것이 아니라, 만든 것이 영업에 쓰이지 않는 것이 문제입니다</a:t>
-            </a:r>
-            <a:endParaRPr lang="en-US" sz="2100" dirty="0"/>
+              <a:t>문제는 기능 부족이 아니라, 만든 것이 쓰이지 않는 것입니다</a:t>
+            </a:r>
+            <a:endParaRPr lang="en-US" sz="1900" dirty="0"/>
           </a:p>
         </p:txBody>
       </p:sp>
@@ -10137,12 +10137,12 @@
         </p:nvSpPr>
         <p:spPr>
           <a:xfrm>
-            <a:off x="502920" y="1033272"/>
-            <a:ext cx="8138160" cy="310896"/>
+            <a:off x="502920" y="1024128"/>
+            <a:ext cx="8138160" cy="384048"/>
           </a:xfrm>
           <a:prstGeom prst="roundRect">
             <a:avLst>
-              <a:gd name="adj" fmla="val 17647"/>
+              <a:gd name="adj" fmla="val 14286"/>
             </a:avLst>
           </a:prstGeom>
           <a:solidFill>
@@ -10164,27 +10164,27 @@
         </p:nvSpPr>
         <p:spPr>
           <a:xfrm>
-            <a:off x="640080" y="1033272"/>
-            <a:ext cx="7863840" cy="310896"/>
-          </a:xfrm>
-          <a:prstGeom prst="rect">
-            <a:avLst/>
-          </a:prstGeom>
-          <a:noFill/>
-          <a:ln/>
-        </p:spPr>
-        <p:txBody>
-          <a:bodyPr wrap="square" lIns="0" tIns="0" rIns="0" bIns="0" rtlCol="0" anchor="ctr"/>
-          <a:lstStyle/>
-          <a:p>
-            <a:pPr algn="l" indent="0" marL="0">
-              <a:lnSpc>
-                <a:spcPct val="115000"/>
-              </a:lnSpc>
-              <a:buNone/>
-            </a:pPr>
-            <a:r>
-              <a:rPr lang="en-US" sz="950" b="1" dirty="0">
+            <a:off x="640080" y="1024128"/>
+            <a:ext cx="7863840" cy="384048"/>
+          </a:xfrm>
+          <a:prstGeom prst="rect">
+            <a:avLst/>
+          </a:prstGeom>
+          <a:noFill/>
+          <a:ln/>
+        </p:spPr>
+        <p:txBody>
+          <a:bodyPr wrap="square" lIns="0" tIns="0" rIns="0" bIns="0" rtlCol="0" anchor="ctr"/>
+          <a:lstStyle/>
+          <a:p>
+            <a:pPr algn="l" indent="0" marL="0">
+              <a:lnSpc>
+                <a:spcPct val="115000"/>
+              </a:lnSpc>
+              <a:buNone/>
+            </a:pPr>
+            <a:r>
+              <a:rPr lang="en-US" sz="900" b="1" dirty="0">
                 <a:solidFill>
                   <a:srgbClr val="3182F6"/>
                 </a:solidFill>
@@ -10201,7 +10201,7 @@
               <a:buNone/>
             </a:pPr>
             <a:r>
-              <a:rPr lang="en-US" sz="950" b="1" dirty="0">
+              <a:rPr lang="en-US" sz="900" b="1" dirty="0">
                 <a:solidFill>
                   <a:srgbClr val="333D4B"/>
                 </a:solidFill>
@@ -10209,9 +10209,9 @@
                 <a:ea typeface="맑은 고딕" pitchFamily="34" charset="-122"/>
                 <a:cs typeface="맑은 고딕" pitchFamily="34" charset="-120"/>
               </a:rPr>
-              <a:t>10월 오픈 MeAI 대문을 영업포탈의 "입구"로 고도화하면, 추천 고객 · 컨텐츠 · 업무 화면이 한 흐름으로 이어집니다</a:t>
-            </a:r>
-            <a:endParaRPr lang="en-US" sz="950" dirty="0"/>
+              <a:t>10월 오픈 MeAI 대문을 영업포탈의 입구로 고도화하면 추천 고객 · 컨텐츠 · 업무 화면이 한 흐름으로 이어집니다</a:t>
+            </a:r>
+            <a:endParaRPr lang="en-US" sz="900" dirty="0"/>
           </a:p>
         </p:txBody>
       </p:sp>
@@ -11530,7 +11530,7 @@
               <a:buNone/>
             </a:pPr>
             <a:r>
-              <a:rPr lang="en-US" sz="2100" b="1" dirty="0">
+              <a:rPr lang="en-US" sz="1900" b="1" dirty="0">
                 <a:solidFill>
                   <a:srgbClr val="191F28"/>
                 </a:solidFill>
@@ -11538,9 +11538,9 @@
                 <a:ea typeface="맑은 고딕" pitchFamily="34" charset="-122"/>
                 <a:cs typeface="맑은 고딕" pitchFamily="34" charset="-120"/>
               </a:rPr>
-              <a:t>316개 페이지, 목차를 보는 데만 60개 화면이 필요합니다</a:t>
-            </a:r>
-            <a:endParaRPr lang="en-US" sz="2100" dirty="0"/>
+              <a:t>316개 페이지, 목차만 60개 화면입니다</a:t>
+            </a:r>
+            <a:endParaRPr lang="en-US" sz="1900" dirty="0"/>
           </a:p>
         </p:txBody>
       </p:sp>
@@ -11552,12 +11552,12 @@
         </p:nvSpPr>
         <p:spPr>
           <a:xfrm>
-            <a:off x="502920" y="1033272"/>
-            <a:ext cx="8138160" cy="310896"/>
+            <a:off x="502920" y="1024128"/>
+            <a:ext cx="8138160" cy="384048"/>
           </a:xfrm>
           <a:prstGeom prst="roundRect">
             <a:avLst>
-              <a:gd name="adj" fmla="val 17647"/>
+              <a:gd name="adj" fmla="val 14286"/>
             </a:avLst>
           </a:prstGeom>
           <a:solidFill>
@@ -11579,27 +11579,27 @@
         </p:nvSpPr>
         <p:spPr>
           <a:xfrm>
-            <a:off x="640080" y="1033272"/>
-            <a:ext cx="7863840" cy="310896"/>
-          </a:xfrm>
-          <a:prstGeom prst="rect">
-            <a:avLst/>
-          </a:prstGeom>
-          <a:noFill/>
-          <a:ln/>
-        </p:spPr>
-        <p:txBody>
-          <a:bodyPr wrap="square" lIns="0" tIns="0" rIns="0" bIns="0" rtlCol="0" anchor="ctr"/>
-          <a:lstStyle/>
-          <a:p>
-            <a:pPr algn="l" indent="0" marL="0">
-              <a:lnSpc>
-                <a:spcPct val="115000"/>
-              </a:lnSpc>
-              <a:buNone/>
-            </a:pPr>
-            <a:r>
-              <a:rPr lang="en-US" sz="950" b="1" dirty="0">
+            <a:off x="640080" y="1024128"/>
+            <a:ext cx="7863840" cy="384048"/>
+          </a:xfrm>
+          <a:prstGeom prst="rect">
+            <a:avLst/>
+          </a:prstGeom>
+          <a:noFill/>
+          <a:ln/>
+        </p:spPr>
+        <p:txBody>
+          <a:bodyPr wrap="square" lIns="0" tIns="0" rIns="0" bIns="0" rtlCol="0" anchor="ctr"/>
+          <a:lstStyle/>
+          <a:p>
+            <a:pPr algn="l" indent="0" marL="0">
+              <a:lnSpc>
+                <a:spcPct val="115000"/>
+              </a:lnSpc>
+              <a:buNone/>
+            </a:pPr>
+            <a:r>
+              <a:rPr lang="en-US" sz="900" b="1" dirty="0">
                 <a:solidFill>
                   <a:srgbClr val="3182F6"/>
                 </a:solidFill>
@@ -11616,7 +11616,7 @@
               <a:buNone/>
             </a:pPr>
             <a:r>
-              <a:rPr lang="en-US" sz="950" b="1" dirty="0">
+              <a:rPr lang="en-US" sz="900" b="1" dirty="0">
                 <a:solidFill>
                   <a:srgbClr val="333D4B"/>
                 </a:solidFill>
@@ -11626,7 +11626,7 @@
               </a:rPr>
               <a:t>아래는 기능 화면이 아니라 영업포탈의 "메뉴 목차" 캡처 60장입니다. 어디에 무엇이 있는지 기억하지 못하면 기능은 없는 것과 같습니다</a:t>
             </a:r>
-            <a:endParaRPr lang="en-US" sz="950" dirty="0"/>
+            <a:endParaRPr lang="en-US" sz="900" dirty="0"/>
           </a:p>
         </p:txBody>
       </p:sp>
@@ -11738,27 +11738,27 @@
         </p:nvSpPr>
         <p:spPr>
           <a:xfrm>
-            <a:off x="6035040" y="1572768"/>
-            <a:ext cx="960120" cy="457200"/>
-          </a:xfrm>
-          <a:prstGeom prst="rect">
-            <a:avLst/>
-          </a:prstGeom>
-          <a:noFill/>
-          <a:ln/>
-        </p:spPr>
-        <p:txBody>
-          <a:bodyPr wrap="square" lIns="0" tIns="0" rIns="0" bIns="0" rtlCol="0" anchor="ctr"/>
-          <a:lstStyle/>
-          <a:p>
-            <a:pPr algn="l" indent="0" marL="0">
-              <a:lnSpc>
-                <a:spcPct val="115000"/>
-              </a:lnSpc>
-              <a:buNone/>
-            </a:pPr>
-            <a:r>
-              <a:rPr lang="en-US" sz="2200" b="1" dirty="0">
+            <a:off x="5989320" y="1572768"/>
+            <a:ext cx="1051560" cy="457200"/>
+          </a:xfrm>
+          <a:prstGeom prst="rect">
+            <a:avLst/>
+          </a:prstGeom>
+          <a:noFill/>
+          <a:ln/>
+        </p:spPr>
+        <p:txBody>
+          <a:bodyPr wrap="square" lIns="0" tIns="0" rIns="0" bIns="0" rtlCol="0" anchor="ctr"/>
+          <a:lstStyle/>
+          <a:p>
+            <a:pPr algn="l" indent="0" marL="0">
+              <a:lnSpc>
+                <a:spcPct val="115000"/>
+              </a:lnSpc>
+              <a:buNone/>
+            </a:pPr>
+            <a:r>
+              <a:rPr lang="en-US" sz="1900" b="1" dirty="0">
                 <a:solidFill>
                   <a:srgbClr val="F04452"/>
                 </a:solidFill>
@@ -11768,7 +11768,7 @@
               </a:rPr>
               <a:t>316개</a:t>
             </a:r>
-            <a:endParaRPr lang="en-US" sz="2200" dirty="0"/>
+            <a:endParaRPr lang="en-US" sz="1900" dirty="0"/>
           </a:p>
         </p:txBody>
       </p:sp>
@@ -11898,27 +11898,27 @@
         </p:nvSpPr>
         <p:spPr>
           <a:xfrm>
-            <a:off x="7498080" y="1572768"/>
-            <a:ext cx="960120" cy="457200"/>
-          </a:xfrm>
-          <a:prstGeom prst="rect">
-            <a:avLst/>
-          </a:prstGeom>
-          <a:noFill/>
-          <a:ln/>
-        </p:spPr>
-        <p:txBody>
-          <a:bodyPr wrap="square" lIns="0" tIns="0" rIns="0" bIns="0" rtlCol="0" anchor="ctr"/>
-          <a:lstStyle/>
-          <a:p>
-            <a:pPr algn="l" indent="0" marL="0">
-              <a:lnSpc>
-                <a:spcPct val="115000"/>
-              </a:lnSpc>
-              <a:buNone/>
-            </a:pPr>
-            <a:r>
-              <a:rPr lang="en-US" sz="2200" b="1" dirty="0">
+            <a:off x="7452360" y="1572768"/>
+            <a:ext cx="1051560" cy="457200"/>
+          </a:xfrm>
+          <a:prstGeom prst="rect">
+            <a:avLst/>
+          </a:prstGeom>
+          <a:noFill/>
+          <a:ln/>
+        </p:spPr>
+        <p:txBody>
+          <a:bodyPr wrap="square" lIns="0" tIns="0" rIns="0" bIns="0" rtlCol="0" anchor="ctr"/>
+          <a:lstStyle/>
+          <a:p>
+            <a:pPr algn="l" indent="0" marL="0">
+              <a:lnSpc>
+                <a:spcPct val="115000"/>
+              </a:lnSpc>
+              <a:buNone/>
+            </a:pPr>
+            <a:r>
+              <a:rPr lang="en-US" sz="1900" b="1" dirty="0">
                 <a:solidFill>
                   <a:srgbClr val="F04452"/>
                 </a:solidFill>
@@ -11928,7 +11928,7 @@
               </a:rPr>
               <a:t>47%</a:t>
             </a:r>
-            <a:endParaRPr lang="en-US" sz="2200" dirty="0"/>
+            <a:endParaRPr lang="en-US" sz="1900" dirty="0"/>
           </a:p>
         </p:txBody>
       </p:sp>
@@ -12058,27 +12058,27 @@
         </p:nvSpPr>
         <p:spPr>
           <a:xfrm>
-            <a:off x="6035040" y="3127248"/>
-            <a:ext cx="960120" cy="457200"/>
-          </a:xfrm>
-          <a:prstGeom prst="rect">
-            <a:avLst/>
-          </a:prstGeom>
-          <a:noFill/>
-          <a:ln/>
-        </p:spPr>
-        <p:txBody>
-          <a:bodyPr wrap="square" lIns="0" tIns="0" rIns="0" bIns="0" rtlCol="0" anchor="ctr"/>
-          <a:lstStyle/>
-          <a:p>
-            <a:pPr algn="l" indent="0" marL="0">
-              <a:lnSpc>
-                <a:spcPct val="115000"/>
-              </a:lnSpc>
-              <a:buNone/>
-            </a:pPr>
-            <a:r>
-              <a:rPr lang="en-US" sz="2200" b="1" dirty="0">
+            <a:off x="5989320" y="3127248"/>
+            <a:ext cx="1051560" cy="457200"/>
+          </a:xfrm>
+          <a:prstGeom prst="rect">
+            <a:avLst/>
+          </a:prstGeom>
+          <a:noFill/>
+          <a:ln/>
+        </p:spPr>
+        <p:txBody>
+          <a:bodyPr wrap="square" lIns="0" tIns="0" rIns="0" bIns="0" rtlCol="0" anchor="ctr"/>
+          <a:lstStyle/>
+          <a:p>
+            <a:pPr algn="l" indent="0" marL="0">
+              <a:lnSpc>
+                <a:spcPct val="115000"/>
+              </a:lnSpc>
+              <a:buNone/>
+            </a:pPr>
+            <a:r>
+              <a:rPr lang="en-US" sz="1900" b="1" dirty="0">
                 <a:solidFill>
                   <a:srgbClr val="F04452"/>
                 </a:solidFill>
@@ -12088,7 +12088,7 @@
               </a:rPr>
               <a:t>18단계</a:t>
             </a:r>
-            <a:endParaRPr lang="en-US" sz="2200" dirty="0"/>
+            <a:endParaRPr lang="en-US" sz="1900" dirty="0"/>
           </a:p>
         </p:txBody>
       </p:sp>
@@ -12218,27 +12218,27 @@
         </p:nvSpPr>
         <p:spPr>
           <a:xfrm>
-            <a:off x="7498080" y="3127248"/>
-            <a:ext cx="960120" cy="457200"/>
-          </a:xfrm>
-          <a:prstGeom prst="rect">
-            <a:avLst/>
-          </a:prstGeom>
-          <a:noFill/>
-          <a:ln/>
-        </p:spPr>
-        <p:txBody>
-          <a:bodyPr wrap="square" lIns="0" tIns="0" rIns="0" bIns="0" rtlCol="0" anchor="ctr"/>
-          <a:lstStyle/>
-          <a:p>
-            <a:pPr algn="l" indent="0" marL="0">
-              <a:lnSpc>
-                <a:spcPct val="115000"/>
-              </a:lnSpc>
-              <a:buNone/>
-            </a:pPr>
-            <a:r>
-              <a:rPr lang="en-US" sz="2200" b="1" dirty="0">
+            <a:off x="7452360" y="3127248"/>
+            <a:ext cx="1051560" cy="457200"/>
+          </a:xfrm>
+          <a:prstGeom prst="rect">
+            <a:avLst/>
+          </a:prstGeom>
+          <a:noFill/>
+          <a:ln/>
+        </p:spPr>
+        <p:txBody>
+          <a:bodyPr wrap="square" lIns="0" tIns="0" rIns="0" bIns="0" rtlCol="0" anchor="ctr"/>
+          <a:lstStyle/>
+          <a:p>
+            <a:pPr algn="l" indent="0" marL="0">
+              <a:lnSpc>
+                <a:spcPct val="115000"/>
+              </a:lnSpc>
+              <a:buNone/>
+            </a:pPr>
+            <a:r>
+              <a:rPr lang="en-US" sz="1900" b="1" dirty="0">
                 <a:solidFill>
                   <a:srgbClr val="F04452"/>
                 </a:solidFill>
@@ -12248,7 +12248,7 @@
               </a:rPr>
               <a:t>150개</a:t>
             </a:r>
-            <a:endParaRPr lang="en-US" sz="2200" dirty="0"/>
+            <a:endParaRPr lang="en-US" sz="1900" dirty="0"/>
           </a:p>
         </p:txBody>
       </p:sp>
@@ -12578,7 +12578,7 @@
               <a:buNone/>
             </a:pPr>
             <a:r>
-              <a:rPr lang="en-US" sz="2100" b="1" dirty="0">
+              <a:rPr lang="en-US" sz="1900" b="1" dirty="0">
                 <a:solidFill>
                   <a:srgbClr val="191F28"/>
                 </a:solidFill>
@@ -12586,9 +12586,9 @@
                 <a:ea typeface="맑은 고딕" pitchFamily="34" charset="-122"/>
                 <a:cs typeface="맑은 고딕" pitchFamily="34" charset="-120"/>
               </a:rPr>
-              <a:t>비용을 들여 사온 컨텐츠가, 영업가족이 몰라서 방치됩니다</a:t>
-            </a:r>
-            <a:endParaRPr lang="en-US" sz="2100" dirty="0"/>
+              <a:t>비용 들여 사온 컨텐츠가 몰라서 방치됩니다</a:t>
+            </a:r>
+            <a:endParaRPr lang="en-US" sz="1900" dirty="0"/>
           </a:p>
         </p:txBody>
       </p:sp>
@@ -12600,12 +12600,12 @@
         </p:nvSpPr>
         <p:spPr>
           <a:xfrm>
-            <a:off x="502920" y="1033272"/>
-            <a:ext cx="8138160" cy="310896"/>
+            <a:off x="502920" y="1024128"/>
+            <a:ext cx="8138160" cy="384048"/>
           </a:xfrm>
           <a:prstGeom prst="roundRect">
             <a:avLst>
-              <a:gd name="adj" fmla="val 17647"/>
+              <a:gd name="adj" fmla="val 14286"/>
             </a:avLst>
           </a:prstGeom>
           <a:solidFill>
@@ -12627,27 +12627,27 @@
         </p:nvSpPr>
         <p:spPr>
           <a:xfrm>
-            <a:off x="640080" y="1033272"/>
-            <a:ext cx="7863840" cy="310896"/>
-          </a:xfrm>
-          <a:prstGeom prst="rect">
-            <a:avLst/>
-          </a:prstGeom>
-          <a:noFill/>
-          <a:ln/>
-        </p:spPr>
-        <p:txBody>
-          <a:bodyPr wrap="square" lIns="0" tIns="0" rIns="0" bIns="0" rtlCol="0" anchor="ctr"/>
-          <a:lstStyle/>
-          <a:p>
-            <a:pPr algn="l" indent="0" marL="0">
-              <a:lnSpc>
-                <a:spcPct val="115000"/>
-              </a:lnSpc>
-              <a:buNone/>
-            </a:pPr>
-            <a:r>
-              <a:rPr lang="en-US" sz="950" b="1" dirty="0">
+            <a:off x="640080" y="1024128"/>
+            <a:ext cx="7863840" cy="384048"/>
+          </a:xfrm>
+          <a:prstGeom prst="rect">
+            <a:avLst/>
+          </a:prstGeom>
+          <a:noFill/>
+          <a:ln/>
+        </p:spPr>
+        <p:txBody>
+          <a:bodyPr wrap="square" lIns="0" tIns="0" rIns="0" bIns="0" rtlCol="0" anchor="ctr"/>
+          <a:lstStyle/>
+          <a:p>
+            <a:pPr algn="l" indent="0" marL="0">
+              <a:lnSpc>
+                <a:spcPct val="115000"/>
+              </a:lnSpc>
+              <a:buNone/>
+            </a:pPr>
+            <a:r>
+              <a:rPr lang="en-US" sz="900" b="1" dirty="0">
                 <a:solidFill>
                   <a:srgbClr val="3182F6"/>
                 </a:solidFill>
@@ -12664,7 +12664,7 @@
               <a:buNone/>
             </a:pPr>
             <a:r>
-              <a:rPr lang="en-US" sz="950" b="1" dirty="0">
+              <a:rPr lang="en-US" sz="900" b="1" dirty="0">
                 <a:solidFill>
                   <a:srgbClr val="333D4B"/>
                 </a:solidFill>
@@ -12672,9 +12672,9 @@
                 <a:ea typeface="맑은 고딕" pitchFamily="34" charset="-122"/>
                 <a:cs typeface="맑은 고딕" pitchFamily="34" charset="-120"/>
               </a:rPr>
-              <a:t>외부 제작 · 구매 컨텐츠와 교육자료는 [활동관리 › 컨텐츠 › Sales 자료 다모여] 3단계 아래에 있습니다. 고정비는 매년 나가는데 활용은 우연에 맡겨져 있습니다</a:t>
-            </a:r>
-            <a:endParaRPr lang="en-US" sz="950" dirty="0"/>
+              <a:t>외부 제작 · 구매 컨텐츠와 교육자료는 메뉴 3단계 아래에 있습니다. 고정비는 매년 나가는데 활용은 우연에 맡겨져 있습니다</a:t>
+            </a:r>
+            <a:endParaRPr lang="en-US" sz="900" dirty="0"/>
           </a:p>
         </p:txBody>
       </p:sp>
@@ -13388,7 +13388,7 @@
               <a:buNone/>
             </a:pPr>
             <a:r>
-              <a:rPr lang="en-US" sz="2100" b="1" dirty="0">
+              <a:rPr lang="en-US" sz="1900" b="1" dirty="0">
                 <a:solidFill>
                   <a:srgbClr val="191F28"/>
                 </a:solidFill>
@@ -13396,9 +13396,9 @@
                 <a:ea typeface="맑은 고딕" pitchFamily="34" charset="-122"/>
                 <a:cs typeface="맑은 고딕" pitchFamily="34" charset="-120"/>
               </a:rPr>
-              <a:t>화면이 "영업" 순서가 아니라 "시스템" 단위로 놓여 있습니다</a:t>
-            </a:r>
-            <a:endParaRPr lang="en-US" sz="2100" dirty="0"/>
+              <a:t>화면이 영업 순서가 아닌 시스템 단위로 놓여 있습니다</a:t>
+            </a:r>
+            <a:endParaRPr lang="en-US" sz="1900" dirty="0"/>
           </a:p>
         </p:txBody>
       </p:sp>
@@ -13410,12 +13410,12 @@
         </p:nvSpPr>
         <p:spPr>
           <a:xfrm>
-            <a:off x="502920" y="1033272"/>
-            <a:ext cx="8138160" cy="310896"/>
+            <a:off x="502920" y="1024128"/>
+            <a:ext cx="8138160" cy="384048"/>
           </a:xfrm>
           <a:prstGeom prst="roundRect">
             <a:avLst>
-              <a:gd name="adj" fmla="val 17647"/>
+              <a:gd name="adj" fmla="val 14286"/>
             </a:avLst>
           </a:prstGeom>
           <a:solidFill>
@@ -13437,27 +13437,27 @@
         </p:nvSpPr>
         <p:spPr>
           <a:xfrm>
-            <a:off x="640080" y="1033272"/>
-            <a:ext cx="7863840" cy="310896"/>
-          </a:xfrm>
-          <a:prstGeom prst="rect">
-            <a:avLst/>
-          </a:prstGeom>
-          <a:noFill/>
-          <a:ln/>
-        </p:spPr>
-        <p:txBody>
-          <a:bodyPr wrap="square" lIns="0" tIns="0" rIns="0" bIns="0" rtlCol="0" anchor="ctr"/>
-          <a:lstStyle/>
-          <a:p>
-            <a:pPr algn="l" indent="0" marL="0">
-              <a:lnSpc>
-                <a:spcPct val="115000"/>
-              </a:lnSpc>
-              <a:buNone/>
-            </a:pPr>
-            <a:r>
-              <a:rPr lang="en-US" sz="950" b="1" dirty="0">
+            <a:off x="640080" y="1024128"/>
+            <a:ext cx="7863840" cy="384048"/>
+          </a:xfrm>
+          <a:prstGeom prst="rect">
+            <a:avLst/>
+          </a:prstGeom>
+          <a:noFill/>
+          <a:ln/>
+        </p:spPr>
+        <p:txBody>
+          <a:bodyPr wrap="square" lIns="0" tIns="0" rIns="0" bIns="0" rtlCol="0" anchor="ctr"/>
+          <a:lstStyle/>
+          <a:p>
+            <a:pPr algn="l" indent="0" marL="0">
+              <a:lnSpc>
+                <a:spcPct val="115000"/>
+              </a:lnSpc>
+              <a:buNone/>
+            </a:pPr>
+            <a:r>
+              <a:rPr lang="en-US" sz="900" b="1" dirty="0">
                 <a:solidFill>
                   <a:srgbClr val="3182F6"/>
                 </a:solidFill>
@@ -13474,7 +13474,7 @@
               <a:buNone/>
             </a:pPr>
             <a:r>
-              <a:rPr lang="en-US" sz="950" b="1" dirty="0">
+              <a:rPr lang="en-US" sz="900" b="1" dirty="0">
                 <a:solidFill>
                   <a:srgbClr val="333D4B"/>
                 </a:solidFill>
@@ -13484,7 +13484,7 @@
               </a:rPr>
               <a:t>영업포탈의 본질은 영업입니다. 그런데 개별 시스템이 순차적으로 추가되어 왔을 뿐, 영업가족의 하루 순서로 재배열된 적이 없습니다</a:t>
             </a:r>
-            <a:endParaRPr lang="en-US" sz="950" dirty="0"/>
+            <a:endParaRPr lang="en-US" sz="900" dirty="0"/>
           </a:p>
         </p:txBody>
       </p:sp>
@@ -14524,7 +14524,7 @@
               <a:buNone/>
             </a:pPr>
             <a:r>
-              <a:rPr lang="en-US" sz="2100" b="1" dirty="0">
+              <a:rPr lang="en-US" sz="1900" b="1" dirty="0">
                 <a:solidFill>
                   <a:srgbClr val="191F28"/>
                 </a:solidFill>
@@ -14532,9 +14532,9 @@
                 <a:ea typeface="맑은 고딕" pitchFamily="34" charset="-122"/>
                 <a:cs typeface="맑은 고딕" pitchFamily="34" charset="-120"/>
               </a:rPr>
-              <a:t>MeAI 대문을 영업포탈의 입구로, 없어지는 화면 없이 길만 새로 냅니다</a:t>
-            </a:r>
-            <a:endParaRPr lang="en-US" sz="2100" dirty="0"/>
+              <a:t>MeAI 대문을 영업포탈의 입구로 삼습니다</a:t>
+            </a:r>
+            <a:endParaRPr lang="en-US" sz="1900" dirty="0"/>
           </a:p>
         </p:txBody>
       </p:sp>
@@ -14546,12 +14546,12 @@
         </p:nvSpPr>
         <p:spPr>
           <a:xfrm>
-            <a:off x="502920" y="1033272"/>
-            <a:ext cx="8138160" cy="310896"/>
+            <a:off x="502920" y="1024128"/>
+            <a:ext cx="8138160" cy="384048"/>
           </a:xfrm>
           <a:prstGeom prst="roundRect">
             <a:avLst>
-              <a:gd name="adj" fmla="val 17647"/>
+              <a:gd name="adj" fmla="val 14286"/>
             </a:avLst>
           </a:prstGeom>
           <a:solidFill>
@@ -14573,27 +14573,27 @@
         </p:nvSpPr>
         <p:spPr>
           <a:xfrm>
-            <a:off x="640080" y="1033272"/>
-            <a:ext cx="7863840" cy="310896"/>
-          </a:xfrm>
-          <a:prstGeom prst="rect">
-            <a:avLst/>
-          </a:prstGeom>
-          <a:noFill/>
-          <a:ln/>
-        </p:spPr>
-        <p:txBody>
-          <a:bodyPr wrap="square" lIns="0" tIns="0" rIns="0" bIns="0" rtlCol="0" anchor="ctr"/>
-          <a:lstStyle/>
-          <a:p>
-            <a:pPr algn="l" indent="0" marL="0">
-              <a:lnSpc>
-                <a:spcPct val="115000"/>
-              </a:lnSpc>
-              <a:buNone/>
-            </a:pPr>
-            <a:r>
-              <a:rPr lang="en-US" sz="950" b="1" dirty="0">
+            <a:off x="640080" y="1024128"/>
+            <a:ext cx="7863840" cy="384048"/>
+          </a:xfrm>
+          <a:prstGeom prst="rect">
+            <a:avLst/>
+          </a:prstGeom>
+          <a:noFill/>
+          <a:ln/>
+        </p:spPr>
+        <p:txBody>
+          <a:bodyPr wrap="square" lIns="0" tIns="0" rIns="0" bIns="0" rtlCol="0" anchor="ctr"/>
+          <a:lstStyle/>
+          <a:p>
+            <a:pPr algn="l" indent="0" marL="0">
+              <a:lnSpc>
+                <a:spcPct val="115000"/>
+              </a:lnSpc>
+              <a:buNone/>
+            </a:pPr>
+            <a:r>
+              <a:rPr lang="en-US" sz="900" b="1" dirty="0">
                 <a:solidFill>
                   <a:srgbClr val="3182F6"/>
                 </a:solidFill>
@@ -14610,7 +14610,7 @@
               <a:buNone/>
             </a:pPr>
             <a:r>
-              <a:rPr lang="en-US" sz="950" b="1" dirty="0">
+              <a:rPr lang="en-US" sz="900" b="1" dirty="0">
                 <a:solidFill>
                   <a:srgbClr val="333D4B"/>
                 </a:solidFill>
@@ -14620,7 +14620,7 @@
               </a:rPr>
               <a:t>10월 오픈 예정인 MeAI 대문(CRM)이 이미 "입구"의 형태를 갖추고 있습니다. 여기에 세 가지를 더해 영업포탈 전체의 진입층으로 확장합니다</a:t>
             </a:r>
-            <a:endParaRPr lang="en-US" sz="950" dirty="0"/>
+            <a:endParaRPr lang="en-US" sz="900" dirty="0"/>
           </a:p>
         </p:txBody>
       </p:sp>
@@ -15818,7 +15818,7 @@
               <a:buNone/>
             </a:pPr>
             <a:r>
-              <a:rPr lang="en-US" sz="2100" b="1" dirty="0">
+              <a:rPr lang="en-US" sz="1900" b="1" dirty="0">
                 <a:solidFill>
                   <a:srgbClr val="191F28"/>
                 </a:solidFill>
@@ -15826,9 +15826,9 @@
                 <a:ea typeface="맑은 고딕" pitchFamily="34" charset="-122"/>
                 <a:cs typeface="맑은 고딕" pitchFamily="34" charset="-120"/>
               </a:rPr>
-              <a:t>10월 오픈 MeAI 대문(가안) — 입구의 뼈대는 이미 만들어져 있습니다</a:t>
-            </a:r>
-            <a:endParaRPr lang="en-US" sz="2100" dirty="0"/>
+              <a:t>10월 오픈 대문(가안), 입구의 뼈대는 이미 있습니다</a:t>
+            </a:r>
+            <a:endParaRPr lang="en-US" sz="1900" dirty="0"/>
           </a:p>
         </p:txBody>
       </p:sp>
@@ -15840,12 +15840,12 @@
         </p:nvSpPr>
         <p:spPr>
           <a:xfrm>
-            <a:off x="502920" y="1033272"/>
-            <a:ext cx="8138160" cy="310896"/>
+            <a:off x="502920" y="1024128"/>
+            <a:ext cx="8138160" cy="384048"/>
           </a:xfrm>
           <a:prstGeom prst="roundRect">
             <a:avLst>
-              <a:gd name="adj" fmla="val 17647"/>
+              <a:gd name="adj" fmla="val 14286"/>
             </a:avLst>
           </a:prstGeom>
           <a:solidFill>
@@ -15867,27 +15867,27 @@
         </p:nvSpPr>
         <p:spPr>
           <a:xfrm>
-            <a:off x="640080" y="1033272"/>
-            <a:ext cx="7863840" cy="310896"/>
-          </a:xfrm>
-          <a:prstGeom prst="rect">
-            <a:avLst/>
-          </a:prstGeom>
-          <a:noFill/>
-          <a:ln/>
-        </p:spPr>
-        <p:txBody>
-          <a:bodyPr wrap="square" lIns="0" tIns="0" rIns="0" bIns="0" rtlCol="0" anchor="ctr"/>
-          <a:lstStyle/>
-          <a:p>
-            <a:pPr algn="l" indent="0" marL="0">
-              <a:lnSpc>
-                <a:spcPct val="115000"/>
-              </a:lnSpc>
-              <a:buNone/>
-            </a:pPr>
-            <a:r>
-              <a:rPr lang="en-US" sz="950" b="1" dirty="0">
+            <a:off x="640080" y="1024128"/>
+            <a:ext cx="7863840" cy="384048"/>
+          </a:xfrm>
+          <a:prstGeom prst="rect">
+            <a:avLst/>
+          </a:prstGeom>
+          <a:noFill/>
+          <a:ln/>
+        </p:spPr>
+        <p:txBody>
+          <a:bodyPr wrap="square" lIns="0" tIns="0" rIns="0" bIns="0" rtlCol="0" anchor="ctr"/>
+          <a:lstStyle/>
+          <a:p>
+            <a:pPr algn="l" indent="0" marL="0">
+              <a:lnSpc>
+                <a:spcPct val="115000"/>
+              </a:lnSpc>
+              <a:buNone/>
+            </a:pPr>
+            <a:r>
+              <a:rPr lang="en-US" sz="900" b="1" dirty="0">
                 <a:solidFill>
                   <a:srgbClr val="3182F6"/>
                 </a:solidFill>
@@ -15904,7 +15904,7 @@
               <a:buNone/>
             </a:pPr>
             <a:r>
-              <a:rPr lang="en-US" sz="950" b="1" dirty="0">
+              <a:rPr lang="en-US" sz="900" b="1" dirty="0">
                 <a:solidFill>
                   <a:srgbClr val="333D4B"/>
                 </a:solidFill>
@@ -15912,9 +15912,9 @@
                 <a:ea typeface="맑은 고딕" pitchFamily="34" charset="-122"/>
                 <a:cs typeface="맑은 고딕" pitchFamily="34" charset="-120"/>
               </a:rPr>
-              <a:t>아래는 KT AX 엔지니어링 센터와 제작 중인 프로토타입입니다. 확정 디자인은 아니며, 이 화면을 기준으로 고도화 지점을 표시했습니다</a:t>
-            </a:r>
-            <a:endParaRPr lang="en-US" sz="950" dirty="0"/>
+              <a:t>제작 중인 프로토타입 화면입니다. 확정 디자인은 아니며, 이 화면을 기준으로 고도화 지점을 표시했습니다</a:t>
+            </a:r>
+            <a:endParaRPr lang="en-US" sz="900" dirty="0"/>
           </a:p>
         </p:txBody>
       </p:sp>
@@ -16717,7 +16717,7 @@
               <a:buNone/>
             </a:pPr>
             <a:r>
-              <a:rPr lang="en-US" sz="2100" b="1" dirty="0">
+              <a:rPr lang="en-US" sz="1900" b="1" dirty="0">
                 <a:solidFill>
                   <a:srgbClr val="191F28"/>
                 </a:solidFill>
@@ -16727,7 +16727,7 @@
               </a:rPr>
               <a:t>추천 고객과 고객용 컨텐츠를 맞물려 제시합니다</a:t>
             </a:r>
-            <a:endParaRPr lang="en-US" sz="2100" dirty="0"/>
+            <a:endParaRPr lang="en-US" sz="1900" dirty="0"/>
           </a:p>
         </p:txBody>
       </p:sp>
@@ -16739,12 +16739,12 @@
         </p:nvSpPr>
         <p:spPr>
           <a:xfrm>
-            <a:off x="502920" y="1033272"/>
-            <a:ext cx="8138160" cy="310896"/>
+            <a:off x="502920" y="1024128"/>
+            <a:ext cx="8138160" cy="384048"/>
           </a:xfrm>
           <a:prstGeom prst="roundRect">
             <a:avLst>
-              <a:gd name="adj" fmla="val 17647"/>
+              <a:gd name="adj" fmla="val 14286"/>
             </a:avLst>
           </a:prstGeom>
           <a:solidFill>
@@ -16766,27 +16766,27 @@
         </p:nvSpPr>
         <p:spPr>
           <a:xfrm>
-            <a:off x="640080" y="1033272"/>
-            <a:ext cx="7863840" cy="310896"/>
-          </a:xfrm>
-          <a:prstGeom prst="rect">
-            <a:avLst/>
-          </a:prstGeom>
-          <a:noFill/>
-          <a:ln/>
-        </p:spPr>
-        <p:txBody>
-          <a:bodyPr wrap="square" lIns="0" tIns="0" rIns="0" bIns="0" rtlCol="0" anchor="ctr"/>
-          <a:lstStyle/>
-          <a:p>
-            <a:pPr algn="l" indent="0" marL="0">
-              <a:lnSpc>
-                <a:spcPct val="115000"/>
-              </a:lnSpc>
-              <a:buNone/>
-            </a:pPr>
-            <a:r>
-              <a:rPr lang="en-US" sz="950" b="1" dirty="0">
+            <a:off x="640080" y="1024128"/>
+            <a:ext cx="7863840" cy="384048"/>
+          </a:xfrm>
+          <a:prstGeom prst="rect">
+            <a:avLst/>
+          </a:prstGeom>
+          <a:noFill/>
+          <a:ln/>
+        </p:spPr>
+        <p:txBody>
+          <a:bodyPr wrap="square" lIns="0" tIns="0" rIns="0" bIns="0" rtlCol="0" anchor="ctr"/>
+          <a:lstStyle/>
+          <a:p>
+            <a:pPr algn="l" indent="0" marL="0">
+              <a:lnSpc>
+                <a:spcPct val="115000"/>
+              </a:lnSpc>
+              <a:buNone/>
+            </a:pPr>
+            <a:r>
+              <a:rPr lang="en-US" sz="900" b="1" dirty="0">
                 <a:solidFill>
                   <a:srgbClr val="3182F6"/>
                 </a:solidFill>
@@ -16803,7 +16803,7 @@
               <a:buNone/>
             </a:pPr>
             <a:r>
-              <a:rPr lang="en-US" sz="950" b="1" dirty="0">
+              <a:rPr lang="en-US" sz="900" b="1" dirty="0">
                 <a:solidFill>
                   <a:srgbClr val="333D4B"/>
                 </a:solidFill>
@@ -16813,7 +16813,7 @@
               </a:rPr>
               <a:t>"누구에게"는 대문이 정해주고, "무엇을"은 컨텐츠 태그가 정해줍니다. 이미 사둔 컨텐츠가 처음으로 갈 곳을 갖게 됩니다</a:t>
             </a:r>
-            <a:endParaRPr lang="en-US" sz="950" dirty="0"/>
+            <a:endParaRPr lang="en-US" sz="900" dirty="0"/>
           </a:p>
         </p:txBody>
       </p:sp>
@@ -18493,7 +18493,7 @@
               <a:buNone/>
             </a:pPr>
             <a:r>
-              <a:rPr lang="en-US" sz="2100" b="1" dirty="0">
+              <a:rPr lang="en-US" sz="1900" b="1" dirty="0">
                 <a:solidFill>
                   <a:srgbClr val="191F28"/>
                 </a:solidFill>
@@ -18501,9 +18501,9 @@
                 <a:ea typeface="맑은 고딕" pitchFamily="34" charset="-122"/>
                 <a:cs typeface="맑은 고딕" pitchFamily="34" charset="-120"/>
               </a:rPr>
-              <a:t>카드의 [다음 행동]이 316개 화면 중 필요한 곳으로 바로 데려갑니다</a:t>
-            </a:r>
-            <a:endParaRPr lang="en-US" sz="2100" dirty="0"/>
+              <a:t>카드의 [다음 행동]이 업무 화면으로 바로 데려갑니다</a:t>
+            </a:r>
+            <a:endParaRPr lang="en-US" sz="1900" dirty="0"/>
           </a:p>
         </p:txBody>
       </p:sp>
@@ -18515,12 +18515,12 @@
         </p:nvSpPr>
         <p:spPr>
           <a:xfrm>
-            <a:off x="502920" y="1033272"/>
-            <a:ext cx="8138160" cy="310896"/>
+            <a:off x="502920" y="1024128"/>
+            <a:ext cx="8138160" cy="384048"/>
           </a:xfrm>
           <a:prstGeom prst="roundRect">
             <a:avLst>
-              <a:gd name="adj" fmla="val 17647"/>
+              <a:gd name="adj" fmla="val 14286"/>
             </a:avLst>
           </a:prstGeom>
           <a:solidFill>
@@ -18542,27 +18542,27 @@
         </p:nvSpPr>
         <p:spPr>
           <a:xfrm>
-            <a:off x="640080" y="1033272"/>
-            <a:ext cx="7863840" cy="310896"/>
-          </a:xfrm>
-          <a:prstGeom prst="rect">
-            <a:avLst/>
-          </a:prstGeom>
-          <a:noFill/>
-          <a:ln/>
-        </p:spPr>
-        <p:txBody>
-          <a:bodyPr wrap="square" lIns="0" tIns="0" rIns="0" bIns="0" rtlCol="0" anchor="ctr"/>
-          <a:lstStyle/>
-          <a:p>
-            <a:pPr algn="l" indent="0" marL="0">
-              <a:lnSpc>
-                <a:spcPct val="115000"/>
-              </a:lnSpc>
-              <a:buNone/>
-            </a:pPr>
-            <a:r>
-              <a:rPr lang="en-US" sz="950" b="1" dirty="0">
+            <a:off x="640080" y="1024128"/>
+            <a:ext cx="7863840" cy="384048"/>
+          </a:xfrm>
+          <a:prstGeom prst="rect">
+            <a:avLst/>
+          </a:prstGeom>
+          <a:noFill/>
+          <a:ln/>
+        </p:spPr>
+        <p:txBody>
+          <a:bodyPr wrap="square" lIns="0" tIns="0" rIns="0" bIns="0" rtlCol="0" anchor="ctr"/>
+          <a:lstStyle/>
+          <a:p>
+            <a:pPr algn="l" indent="0" marL="0">
+              <a:lnSpc>
+                <a:spcPct val="115000"/>
+              </a:lnSpc>
+              <a:buNone/>
+            </a:pPr>
+            <a:r>
+              <a:rPr lang="en-US" sz="900" b="1" dirty="0">
                 <a:solidFill>
                   <a:srgbClr val="3182F6"/>
                 </a:solidFill>
@@ -18579,7 +18579,7 @@
               <a:buNone/>
             </a:pPr>
             <a:r>
-              <a:rPr lang="en-US" sz="950" b="1" dirty="0">
+              <a:rPr lang="en-US" sz="900" b="1" dirty="0">
                 <a:solidFill>
                   <a:srgbClr val="333D4B"/>
                 </a:solidFill>
@@ -18587,9 +18587,9 @@
                 <a:ea typeface="맑은 고딕" pitchFamily="34" charset="-122"/>
                 <a:cs typeface="맑은 고딕" pitchFamily="34" charset="-120"/>
               </a:rPr>
-              <a:t>메뉴를 외우는 대신, 고객이 정해진 상태에서 보장분석 · 가입설계 · 가계약 · 동의 재취득 · 컨텐츠 발송 화면을 한 번에 엽니다. 기존 화면은 그대로입니다</a:t>
-            </a:r>
-            <a:endParaRPr lang="en-US" sz="950" dirty="0"/>
+              <a:t>메뉴를 외우는 대신, 고객이 정해진 상태로 보장분석 · 가입설계 · 가계약 · 동의 · 컨텐츠 발송 화면을 한 번에 엽니다. 기존 화면은 그대로입니다</a:t>
+            </a:r>
+            <a:endParaRPr lang="en-US" sz="900" dirty="0"/>
           </a:p>
         </p:txBody>
       </p:sp>

--- a/docs/MeAI_CRM대문_고도화_제안_대표이사보고_2026.09.pptx
+++ b/docs/MeAI_CRM대문_고도화_제안_대표이사보고_2026.09.pptx
@@ -8761,8 +8761,8 @@
         </p:nvSpPr>
         <p:spPr>
           <a:xfrm>
-            <a:off x="6675120" y="1097280"/>
-            <a:ext cx="1188720" cy="237744"/>
+            <a:off x="6492240" y="1097280"/>
+            <a:ext cx="1143000" cy="237744"/>
           </a:xfrm>
           <a:prstGeom prst="rect">
             <a:avLst/>
@@ -8803,8 +8803,8 @@
         </p:nvSpPr>
         <p:spPr>
           <a:xfrm>
-            <a:off x="7909560" y="1097280"/>
-            <a:ext cx="731520" cy="237744"/>
+            <a:off x="7680960" y="1097280"/>
+            <a:ext cx="960120" cy="237744"/>
           </a:xfrm>
           <a:prstGeom prst="rect">
             <a:avLst/>
@@ -8979,7 +8979,7 @@
         <p:spPr>
           <a:xfrm>
             <a:off x="3794760" y="1417320"/>
-            <a:ext cx="2788920" cy="566928"/>
+            <a:ext cx="2651760" cy="566928"/>
           </a:xfrm>
           <a:prstGeom prst="rect">
             <a:avLst/>
@@ -9020,8 +9020,8 @@
         </p:nvSpPr>
         <p:spPr>
           <a:xfrm>
-            <a:off x="6675120" y="1417320"/>
-            <a:ext cx="1188720" cy="566928"/>
+            <a:off x="6492240" y="1417320"/>
+            <a:ext cx="1143000" cy="566928"/>
           </a:xfrm>
           <a:prstGeom prst="rect">
             <a:avLst/>
@@ -9062,8 +9062,8 @@
         </p:nvSpPr>
         <p:spPr>
           <a:xfrm>
-            <a:off x="7909560" y="1417320"/>
-            <a:ext cx="731520" cy="566928"/>
+            <a:off x="7680960" y="1417320"/>
+            <a:ext cx="914400" cy="566928"/>
           </a:xfrm>
           <a:prstGeom prst="rect">
             <a:avLst/>
@@ -9238,7 +9238,7 @@
         <p:spPr>
           <a:xfrm>
             <a:off x="3794760" y="2057400"/>
-            <a:ext cx="2788920" cy="566928"/>
+            <a:ext cx="2651760" cy="566928"/>
           </a:xfrm>
           <a:prstGeom prst="rect">
             <a:avLst/>
@@ -9279,8 +9279,8 @@
         </p:nvSpPr>
         <p:spPr>
           <a:xfrm>
-            <a:off x="6675120" y="2057400"/>
-            <a:ext cx="1188720" cy="566928"/>
+            <a:off x="6492240" y="2057400"/>
+            <a:ext cx="1143000" cy="566928"/>
           </a:xfrm>
           <a:prstGeom prst="rect">
             <a:avLst/>
@@ -9321,8 +9321,8 @@
         </p:nvSpPr>
         <p:spPr>
           <a:xfrm>
-            <a:off x="7909560" y="2057400"/>
-            <a:ext cx="731520" cy="566928"/>
+            <a:off x="7680960" y="2057400"/>
+            <a:ext cx="914400" cy="566928"/>
           </a:xfrm>
           <a:prstGeom prst="rect">
             <a:avLst/>
@@ -9497,7 +9497,7 @@
         <p:spPr>
           <a:xfrm>
             <a:off x="3794760" y="2697480"/>
-            <a:ext cx="2788920" cy="566928"/>
+            <a:ext cx="2651760" cy="566928"/>
           </a:xfrm>
           <a:prstGeom prst="rect">
             <a:avLst/>
@@ -9538,8 +9538,8 @@
         </p:nvSpPr>
         <p:spPr>
           <a:xfrm>
-            <a:off x="6675120" y="2697480"/>
-            <a:ext cx="1188720" cy="566928"/>
+            <a:off x="6492240" y="2697480"/>
+            <a:ext cx="1143000" cy="566928"/>
           </a:xfrm>
           <a:prstGeom prst="rect">
             <a:avLst/>
@@ -9580,8 +9580,8 @@
         </p:nvSpPr>
         <p:spPr>
           <a:xfrm>
-            <a:off x="7909560" y="2697480"/>
-            <a:ext cx="731520" cy="566928"/>
+            <a:off x="7680960" y="2697480"/>
+            <a:ext cx="914400" cy="566928"/>
           </a:xfrm>
           <a:prstGeom prst="rect">
             <a:avLst/>
@@ -9756,7 +9756,7 @@
         <p:spPr>
           <a:xfrm>
             <a:off x="3794760" y="3337560"/>
-            <a:ext cx="2788920" cy="566928"/>
+            <a:ext cx="2651760" cy="566928"/>
           </a:xfrm>
           <a:prstGeom prst="rect">
             <a:avLst/>
@@ -9797,8 +9797,8 @@
         </p:nvSpPr>
         <p:spPr>
           <a:xfrm>
-            <a:off x="6675120" y="3337560"/>
-            <a:ext cx="1188720" cy="566928"/>
+            <a:off x="6492240" y="3337560"/>
+            <a:ext cx="1143000" cy="566928"/>
           </a:xfrm>
           <a:prstGeom prst="rect">
             <a:avLst/>
@@ -9839,8 +9839,8 @@
         </p:nvSpPr>
         <p:spPr>
           <a:xfrm>
-            <a:off x="7909560" y="3337560"/>
-            <a:ext cx="731520" cy="566928"/>
+            <a:off x="7680960" y="3337560"/>
+            <a:ext cx="914400" cy="566928"/>
           </a:xfrm>
           <a:prstGeom prst="rect">
             <a:avLst/>
